--- a/dist/초5/사회·역사/역사와생활/초5_사회·역사_역사와생활_03_고려.pptx
+++ b/dist/초5/사회·역사/역사와생활/초5_사회·역사_역사와생활_03_고려.pptx
@@ -120,13 +120,13 @@
   <p:extLst>
     <p:ext uri="{521415D9-36F7-43E2-AB2F-B90AF26B5E84}">
       <p14:sectionLst xmlns:p14="http://schemas.microsoft.com/office/powerpoint/2010/main">
-        <p14:section name="도입" id="{bcd4ce25-055c-41e6-418a-488c4d6601c0}">
+        <p14:section name="도입" id="{417e8493-d285-3531-54bc-c65e60fac295}">
           <p14:sldIdLst>
             <p14:sldId id="256"/>
             <p14:sldId id="257"/>
           </p14:sldIdLst>
         </p14:section>
-        <p14:section name="개념" id="{155546ed-e0c1-2f6a-dbbb-17665563b53e}">
+        <p14:section name="개념" id="{e5681bf0-d88a-55a6-afb7-9c4d5175fffa}">
           <p14:sldIdLst>
             <p14:sldId id="258"/>
             <p14:sldId id="259"/>
@@ -135,31 +135,31 @@
             <p14:sldId id="263"/>
           </p14:sldIdLst>
         </p14:section>
-        <p14:section name="연습" id="{195ae584-bb10-ee42-85c9-c173eaa935aa}">
+        <p14:section name="연습" id="{ef91551d-14c0-c4e9-28a0-31aa8d49ea1f}">
           <p14:sldIdLst>
             <p14:sldId id="261"/>
             <p14:sldId id="264"/>
             <p14:sldId id="265"/>
           </p14:sldIdLst>
         </p14:section>
-        <p14:section name="개념" id="{13bd38dd-f384-39f5-b120-913090550c48}">
+        <p14:section name="개념" id="{7ec03d2a-a9d4-aad9-5172-5b40e7848cc2}">
           <p14:sldIdLst/>
         </p14:section>
-        <p14:section name="연습" id="{43bb8603-8579-a222-e601-8ae9964823d4}">
+        <p14:section name="연습" id="{caed10ed-f398-3e08-66fd-eafb1cb3ed83}">
           <p14:sldIdLst/>
         </p14:section>
-        <p14:section name="확인" id="{491c77ba-0179-da3d-4514-a64777215ad7}">
+        <p14:section name="확인" id="{89ebd8a4-9650-85fa-5425-72f58ce59c59}">
           <p14:sldIdLst>
             <p14:sldId id="266"/>
             <p14:sldId id="267"/>
           </p14:sldIdLst>
         </p14:section>
-        <p14:section name="정리" id="{a11dc261-a7f5-1eaf-31ad-ca132f080a79}">
+        <p14:section name="정리" id="{5f66d684-f739-d276-07b9-e8cdd9999a12}">
           <p14:sldIdLst>
             <p14:sldId id="268"/>
           </p14:sldIdLst>
         </p14:section>
-        <p14:section name="보충" id="{74ec0898-313f-3caa-6f6b-739ce8f83ca8}">
+        <p14:section name="보충" id="{31f39d35-159f-74b1-3fde-4198761a430f}">
           <p14:sldIdLst>
             <p14:sldId id="269"/>
           </p14:sldIdLst>

--- a/dist/초5/사회·역사/역사와생활/초5_사회·역사_역사와생활_03_고려.pptx
+++ b/dist/초5/사회·역사/역사와생활/초5_사회·역사_역사와생활_03_고려.pptx
@@ -120,13 +120,13 @@
   <p:extLst>
     <p:ext uri="{521415D9-36F7-43E2-AB2F-B90AF26B5E84}">
       <p14:sectionLst xmlns:p14="http://schemas.microsoft.com/office/powerpoint/2010/main">
-        <p14:section name="도입" id="{417e8493-d285-3531-54bc-c65e60fac295}">
+        <p14:section name="도입" id="{e6ee774b-eae8-0c6d-1e56-018b316411b2}">
           <p14:sldIdLst>
             <p14:sldId id="256"/>
             <p14:sldId id="257"/>
           </p14:sldIdLst>
         </p14:section>
-        <p14:section name="개념" id="{e5681bf0-d88a-55a6-afb7-9c4d5175fffa}">
+        <p14:section name="개념" id="{f0edea17-5465-815b-d3a7-83fd72ab04b1}">
           <p14:sldIdLst>
             <p14:sldId id="258"/>
             <p14:sldId id="259"/>
@@ -135,31 +135,31 @@
             <p14:sldId id="263"/>
           </p14:sldIdLst>
         </p14:section>
-        <p14:section name="연습" id="{ef91551d-14c0-c4e9-28a0-31aa8d49ea1f}">
+        <p14:section name="연습" id="{b7ed1990-cda7-78b2-d9c1-69ddb73f63a6}">
           <p14:sldIdLst>
             <p14:sldId id="261"/>
             <p14:sldId id="264"/>
             <p14:sldId id="265"/>
           </p14:sldIdLst>
         </p14:section>
-        <p14:section name="개념" id="{7ec03d2a-a9d4-aad9-5172-5b40e7848cc2}">
+        <p14:section name="개념" id="{daf66526-b6ea-f0f4-02dd-46977e4dd622}">
           <p14:sldIdLst/>
         </p14:section>
-        <p14:section name="연습" id="{caed10ed-f398-3e08-66fd-eafb1cb3ed83}">
+        <p14:section name="연습" id="{c95504a7-10fe-7851-9750-5f5da3826204}">
           <p14:sldIdLst/>
         </p14:section>
-        <p14:section name="확인" id="{89ebd8a4-9650-85fa-5425-72f58ce59c59}">
+        <p14:section name="확인" id="{79e6c40f-40f1-4870-4a3a-ecb6d3c66955}">
           <p14:sldIdLst>
             <p14:sldId id="266"/>
             <p14:sldId id="267"/>
           </p14:sldIdLst>
         </p14:section>
-        <p14:section name="정리" id="{5f66d684-f739-d276-07b9-e8cdd9999a12}">
+        <p14:section name="정리" id="{f294decd-4306-2f3e-69d7-05793d4d4a36}">
           <p14:sldIdLst>
             <p14:sldId id="268"/>
           </p14:sldIdLst>
         </p14:section>
-        <p14:section name="보충" id="{31f39d35-159f-74b1-3fde-4198761a430f}">
+        <p14:section name="보충" id="{473539be-30ad-df53-79a6-603dc23307bf}">
           <p14:sldIdLst>
             <p14:sldId id="269"/>
           </p14:sldIdLst>
